--- a/figures/editable/01_时序综述图件/08_AnomaMind_Diagnosis.pptx
+++ b/figures/editable/01_时序综述图件/08_AnomaMind_Diagnosis.pptx
@@ -1080,7 +1080,7 @@
               </a:extLst>
             </p:cNvPr>
             <p:cNvSpPr>
-              <a:spLocks xmlns:a="http://schemas.openxmlformats.org/drawingml/2006/main" noGrp="1"/>
+              <a:spLocks xmlns:a="http://schemas.openxmlformats.org/drawingml/2006/main"/>
             </p:cNvSpPr>
             <p:nvPr/>
           </p:nvSpPr>
@@ -1115,7 +1115,7 @@
               </a:extLst>
             </p:cNvPr>
             <p:cNvSpPr>
-              <a:spLocks xmlns:a="http://schemas.openxmlformats.org/drawingml/2006/main" noGrp="1"/>
+              <a:spLocks xmlns:a="http://schemas.openxmlformats.org/drawingml/2006/main"/>
             </p:cNvSpPr>
             <p:nvPr/>
           </p:nvSpPr>
@@ -1171,7 +1171,7 @@
               </a:extLst>
             </p:cNvPr>
             <p:cNvSpPr>
-              <a:spLocks xmlns:a="http://schemas.openxmlformats.org/drawingml/2006/main" noGrp="1"/>
+              <a:spLocks xmlns:a="http://schemas.openxmlformats.org/drawingml/2006/main"/>
             </p:cNvSpPr>
             <p:nvPr/>
           </p:nvSpPr>
@@ -1227,7 +1227,7 @@
               </a:extLst>
             </p:cNvPr>
             <p:cNvSpPr>
-              <a:spLocks xmlns:a="http://schemas.openxmlformats.org/drawingml/2006/main" noGrp="1"/>
+              <a:spLocks xmlns:a="http://schemas.openxmlformats.org/drawingml/2006/main"/>
             </p:cNvSpPr>
             <p:nvPr/>
           </p:nvSpPr>
@@ -1262,14 +1262,14 @@
               </a:extLst>
             </p:cNvPr>
             <p:cNvSpPr>
-              <a:spLocks xmlns:a="http://schemas.openxmlformats.org/drawingml/2006/main" noGrp="1"/>
+              <a:spLocks xmlns:a="http://schemas.openxmlformats.org/drawingml/2006/main"/>
             </p:cNvSpPr>
             <p:nvPr/>
           </p:nvSpPr>
           <p:spPr>
             <a:xfrm xmlns:a="http://schemas.openxmlformats.org/drawingml/2006/main">
               <a:off x="3429000" y="2571750"/>
-              <a:ext cx="2095500" cy="266700"/>
+              <a:ext cx="2095500" cy="457200"/>
             </a:xfrm>
             <a:prstGeom xmlns:a="http://schemas.openxmlformats.org/drawingml/2006/main" prst="rect">
               <a:avLst/>
@@ -1303,7 +1303,7 @@
                   <a:ea typeface="Times New Roman"/>
                   <a:cs typeface="Times New Roman"/>
                 </a:rPr>
-                <a:t>Evidence construction</a:t>
+                <a:t>Adaptive evidence construction</a:t>
               </a:r>
             </a:p>
           </p:txBody>
@@ -1318,14 +1318,14 @@
               </a:extLst>
             </p:cNvPr>
             <p:cNvSpPr>
-              <a:spLocks xmlns:a="http://schemas.openxmlformats.org/drawingml/2006/main" noGrp="1"/>
+              <a:spLocks xmlns:a="http://schemas.openxmlformats.org/drawingml/2006/main"/>
             </p:cNvSpPr>
             <p:nvPr/>
           </p:nvSpPr>
           <p:spPr>
             <a:xfrm xmlns:a="http://schemas.openxmlformats.org/drawingml/2006/main">
-              <a:off x="3448050" y="2876550"/>
-              <a:ext cx="2057400" cy="619125"/>
+              <a:off x="3448050" y="3124200"/>
+              <a:ext cx="2057400" cy="371475"/>
             </a:xfrm>
             <a:prstGeom xmlns:a="http://schemas.openxmlformats.org/drawingml/2006/main" prst="rect">
               <a:avLst/>
@@ -1359,7 +1359,7 @@
                   <a:ea typeface="Times New Roman"/>
                   <a:cs typeface="Times New Roman"/>
                 </a:rPr>
-                <a:t>align and summarize evidence</a:t>
+                <a:t>construct diagnostic evidence</a:t>
               </a:r>
             </a:p>
           </p:txBody>
@@ -1374,7 +1374,7 @@
               </a:extLst>
             </p:cNvPr>
             <p:cNvSpPr>
-              <a:spLocks xmlns:a="http://schemas.openxmlformats.org/drawingml/2006/main" noGrp="1"/>
+              <a:spLocks xmlns:a="http://schemas.openxmlformats.org/drawingml/2006/main"/>
             </p:cNvSpPr>
             <p:nvPr/>
           </p:nvSpPr>
@@ -1409,7 +1409,7 @@
               </a:extLst>
             </p:cNvPr>
             <p:cNvSpPr>
-              <a:spLocks xmlns:a="http://schemas.openxmlformats.org/drawingml/2006/main" noGrp="1"/>
+              <a:spLocks xmlns:a="http://schemas.openxmlformats.org/drawingml/2006/main"/>
             </p:cNvSpPr>
             <p:nvPr/>
           </p:nvSpPr>
@@ -1465,7 +1465,7 @@
               </a:extLst>
             </p:cNvPr>
             <p:cNvSpPr>
-              <a:spLocks xmlns:a="http://schemas.openxmlformats.org/drawingml/2006/main" noGrp="1"/>
+              <a:spLocks xmlns:a="http://schemas.openxmlformats.org/drawingml/2006/main"/>
             </p:cNvSpPr>
             <p:nvPr/>
           </p:nvSpPr>
@@ -1521,7 +1521,7 @@
               </a:extLst>
             </p:cNvPr>
             <p:cNvSpPr>
-              <a:spLocks xmlns:a="http://schemas.openxmlformats.org/drawingml/2006/main" noGrp="1"/>
+              <a:spLocks xmlns:a="http://schemas.openxmlformats.org/drawingml/2006/main"/>
             </p:cNvSpPr>
             <p:nvPr/>
           </p:nvSpPr>
@@ -1556,7 +1556,7 @@
               </a:extLst>
             </p:cNvPr>
             <p:cNvSpPr>
-              <a:spLocks xmlns:a="http://schemas.openxmlformats.org/drawingml/2006/main" noGrp="1"/>
+              <a:spLocks xmlns:a="http://schemas.openxmlformats.org/drawingml/2006/main"/>
             </p:cNvSpPr>
             <p:nvPr/>
           </p:nvSpPr>
@@ -1597,7 +1597,7 @@
                   <a:ea typeface="Times New Roman"/>
                   <a:cs typeface="Times New Roman"/>
                 </a:rPr>
-                <a:t>Diagnosis</a:t>
+                <a:t>Iterative refinement</a:t>
               </a:r>
             </a:p>
           </p:txBody>
@@ -1612,7 +1612,7 @@
               </a:extLst>
             </p:cNvPr>
             <p:cNvSpPr>
-              <a:spLocks xmlns:a="http://schemas.openxmlformats.org/drawingml/2006/main" noGrp="1"/>
+              <a:spLocks xmlns:a="http://schemas.openxmlformats.org/drawingml/2006/main"/>
             </p:cNvSpPr>
             <p:nvPr/>
           </p:nvSpPr>
@@ -1653,7 +1653,7 @@
                   <a:ea typeface="Times New Roman"/>
                   <a:cs typeface="Times New Roman"/>
                 </a:rPr>
-                <a:t>identify cause and confidence</a:t>
+                <a:t>refine anomaly intervals</a:t>
               </a:r>
             </a:p>
           </p:txBody>
@@ -1680,7 +1680,7 @@
                 <a:srgbClr val="438B86"/>
               </a:solidFill>
               <a:prstDash val="solid"/>
-              <a:headEnd type="arrow" w="sm" len="sm"/>
+              <a:tailEnd type="arrow" w="sm" len="sm"/>
             </a:ln>
           </p:spPr>
         </p:cxnSp>
@@ -1706,7 +1706,7 @@
                 <a:srgbClr val="438B86"/>
               </a:solidFill>
               <a:prstDash val="solid"/>
-              <a:headEnd type="arrow" w="sm" len="sm"/>
+              <a:tailEnd type="arrow" w="sm" len="sm"/>
             </a:ln>
           </p:spPr>
         </p:cxnSp>
@@ -1732,7 +1732,7 @@
                 <a:srgbClr val="B77F2B"/>
               </a:solidFill>
               <a:prstDash val="solid"/>
-              <a:headEnd type="arrow" w="sm" len="sm"/>
+              <a:tailEnd type="arrow" w="sm" len="sm"/>
             </a:ln>
           </p:spPr>
         </p:cxnSp>
@@ -1746,7 +1746,7 @@
               </a:extLst>
             </p:cNvPr>
             <p:cNvSpPr>
-              <a:spLocks xmlns:a="http://schemas.openxmlformats.org/drawingml/2006/main" noGrp="1"/>
+              <a:spLocks xmlns:a="http://schemas.openxmlformats.org/drawingml/2006/main"/>
             </p:cNvSpPr>
             <p:nvPr/>
           </p:nvSpPr>
@@ -1781,7 +1781,7 @@
               </a:extLst>
             </p:cNvPr>
             <p:cNvSpPr>
-              <a:spLocks xmlns:a="http://schemas.openxmlformats.org/drawingml/2006/main" noGrp="1"/>
+              <a:spLocks xmlns:a="http://schemas.openxmlformats.org/drawingml/2006/main"/>
             </p:cNvSpPr>
             <p:nvPr/>
           </p:nvSpPr>
@@ -1822,7 +1822,7 @@
                   <a:ea typeface="Times New Roman"/>
                   <a:cs typeface="Times New Roman"/>
                 </a:rPr>
-                <a:t>training and feedback update the detector, diagnostic tools, and review policy</a:t>
+                <a:t>Detector training with rule-based rewards</a:t>
               </a:r>
             </a:p>
           </p:txBody>
@@ -1837,7 +1837,7 @@
               </a:extLst>
             </p:cNvPr>
             <p:cNvSpPr>
-              <a:spLocks xmlns:a="http://schemas.openxmlformats.org/drawingml/2006/main" noGrp="1"/>
+              <a:spLocks xmlns:a="http://schemas.openxmlformats.org/drawingml/2006/main"/>
             </p:cNvSpPr>
             <p:nvPr/>
           </p:nvSpPr>
@@ -1872,7 +1872,7 @@
               </a:extLst>
             </p:cNvPr>
             <p:cNvSpPr>
-              <a:spLocks xmlns:a="http://schemas.openxmlformats.org/drawingml/2006/main" noGrp="1"/>
+              <a:spLocks xmlns:a="http://schemas.openxmlformats.org/drawingml/2006/main"/>
             </p:cNvSpPr>
             <p:nvPr/>
           </p:nvSpPr>
@@ -1913,7 +1913,7 @@
                   <a:ea typeface="Times New Roman"/>
                   <a:cs typeface="Times New Roman"/>
                 </a:rPr>
-                <a:t>toolkit: time-series memory · numerical diagnostics · event labels · evaluator</a:t>
+                <a:t>Toolkit: knowledge memory and numerical diagnostics</a:t>
               </a:r>
             </a:p>
           </p:txBody>
